--- a/2_DCcircuits.pptx
+++ b/2_DCcircuits.pptx
@@ -226,7 +226,7 @@
           <a:p>
             <a:fld id="{50F0DBE5-119B-9546-A717-70798062973B}" type="datetimeFigureOut">
               <a:rPr lang="de-DE" smtClean="0"/>
-              <a:t>23.08.25</a:t>
+              <a:t>08.09.25</a:t>
             </a:fld>
             <a:endParaRPr lang="de-DE"/>
           </a:p>
@@ -640,7 +640,7 @@
           <a:p>
             <a:fld id="{CE5B6352-3465-4344-964A-B25153893676}" type="datetime1">
               <a:rPr lang="de-DE" smtClean="0"/>
-              <a:t>23.08.25</a:t>
+              <a:t>08.09.25</a:t>
             </a:fld>
             <a:endParaRPr lang="de-DE"/>
           </a:p>
@@ -838,7 +838,7 @@
           <a:p>
             <a:fld id="{680476C1-F079-0F40-9C5B-039EA12ABDAA}" type="datetime1">
               <a:rPr lang="de-DE" smtClean="0"/>
-              <a:t>23.08.25</a:t>
+              <a:t>08.09.25</a:t>
             </a:fld>
             <a:endParaRPr lang="de-DE"/>
           </a:p>
@@ -1046,7 +1046,7 @@
           <a:p>
             <a:fld id="{95A166F0-C736-5846-BD29-206B3FE0CE89}" type="datetime1">
               <a:rPr lang="de-DE" smtClean="0"/>
-              <a:t>23.08.25</a:t>
+              <a:t>08.09.25</a:t>
             </a:fld>
             <a:endParaRPr lang="de-DE"/>
           </a:p>
@@ -1244,7 +1244,7 @@
           <a:p>
             <a:fld id="{C501BE91-62CD-C14F-A910-7294FC82D4A0}" type="datetime1">
               <a:rPr lang="de-DE" smtClean="0"/>
-              <a:t>23.08.25</a:t>
+              <a:t>08.09.25</a:t>
             </a:fld>
             <a:endParaRPr lang="de-DE"/>
           </a:p>
@@ -1519,7 +1519,7 @@
           <a:p>
             <a:fld id="{BF974C23-8003-8246-BE47-B5ECC9F69FCF}" type="datetime1">
               <a:rPr lang="de-DE" smtClean="0"/>
-              <a:t>23.08.25</a:t>
+              <a:t>08.09.25</a:t>
             </a:fld>
             <a:endParaRPr lang="de-DE"/>
           </a:p>
@@ -1784,7 +1784,7 @@
           <a:p>
             <a:fld id="{9399C134-D3BA-F044-A1BA-5D8F00C16B33}" type="datetime1">
               <a:rPr lang="de-DE" smtClean="0"/>
-              <a:t>23.08.25</a:t>
+              <a:t>08.09.25</a:t>
             </a:fld>
             <a:endParaRPr lang="de-DE"/>
           </a:p>
@@ -2196,7 +2196,7 @@
           <a:p>
             <a:fld id="{CAA0E14A-B13F-B84D-BA0A-4382E133E05F}" type="datetime1">
               <a:rPr lang="de-DE" smtClean="0"/>
-              <a:t>23.08.25</a:t>
+              <a:t>08.09.25</a:t>
             </a:fld>
             <a:endParaRPr lang="de-DE"/>
           </a:p>
@@ -2337,7 +2337,7 @@
           <a:p>
             <a:fld id="{82499081-64A1-E641-A060-B3FE5E7414AE}" type="datetime1">
               <a:rPr lang="de-DE" smtClean="0"/>
-              <a:t>23.08.25</a:t>
+              <a:t>08.09.25</a:t>
             </a:fld>
             <a:endParaRPr lang="de-DE"/>
           </a:p>
@@ -2450,7 +2450,7 @@
           <a:p>
             <a:fld id="{72507737-E8BF-5348-A8D5-F635D39F9B4A}" type="datetime1">
               <a:rPr lang="de-DE" smtClean="0"/>
-              <a:t>23.08.25</a:t>
+              <a:t>08.09.25</a:t>
             </a:fld>
             <a:endParaRPr lang="de-DE"/>
           </a:p>
@@ -2761,7 +2761,7 @@
           <a:p>
             <a:fld id="{E5AF2D44-8DB2-1E42-B969-A879F4E80DE2}" type="datetime1">
               <a:rPr lang="de-DE" smtClean="0"/>
-              <a:t>23.08.25</a:t>
+              <a:t>08.09.25</a:t>
             </a:fld>
             <a:endParaRPr lang="de-DE"/>
           </a:p>
@@ -3049,7 +3049,7 @@
           <a:p>
             <a:fld id="{BDCC8AD7-B1B1-5742-9D45-5FF116011C65}" type="datetime1">
               <a:rPr lang="de-DE" smtClean="0"/>
-              <a:t>23.08.25</a:t>
+              <a:t>08.09.25</a:t>
             </a:fld>
             <a:endParaRPr lang="de-DE"/>
           </a:p>
@@ -3290,7 +3290,7 @@
           <a:p>
             <a:fld id="{108D9C44-3672-2C4D-8D64-277C579E81B1}" type="datetime1">
               <a:rPr lang="de-DE" smtClean="0"/>
-              <a:t>23.08.25</a:t>
+              <a:t>08.09.25</a:t>
             </a:fld>
             <a:endParaRPr lang="de-DE"/>
           </a:p>
@@ -5305,8 +5305,8 @@
             </p:nvSpPr>
             <p:spPr>
               <a:xfrm>
-                <a:off x="838201" y="5829937"/>
-                <a:ext cx="10515599" cy="662938"/>
+                <a:off x="838201" y="5465002"/>
+                <a:ext cx="10515599" cy="1310359"/>
               </a:xfrm>
               <a:prstGeom prst="rect">
                 <a:avLst/>
@@ -5321,11 +5321,11 @@
               <a:p>
                 <a:r>
                   <a:rPr lang="de-DE" sz="2800" dirty="0"/>
-                  <a:t>for </a:t>
+                  <a:t>voltage </a:t>
                 </a:r>
                 <a:r>
                   <a:rPr lang="de-DE" sz="2800" dirty="0" err="1"/>
-                  <a:t>two</a:t>
+                  <a:t>divider</a:t>
                 </a:r>
                 <a:r>
                   <a:rPr lang="de-DE" sz="2800" dirty="0"/>
@@ -5333,30 +5333,18 @@
                 </a:r>
                 <a:r>
                   <a:rPr lang="de-DE" sz="2800" dirty="0" err="1"/>
-                  <a:t>resistors</a:t>
+                  <a:t>rule</a:t>
                 </a:r>
                 <a:r>
                   <a:rPr lang="de-DE" sz="2800" dirty="0"/>
-                  <a:t>:	 </a:t>
+                  <a:t>:	</a:t>
                 </a:r>
                 <a14:m>
                   <m:oMath xmlns:m="http://schemas.openxmlformats.org/officeDocument/2006/math">
-                    <m:r>
-                      <a:rPr lang="de-DE" sz="2800" b="0" i="1" smtClean="0">
-                        <a:latin typeface="Cambria Math" panose="02040503050406030204" pitchFamily="18" charset="0"/>
-                      </a:rPr>
-                      <m:t>𝑅</m:t>
-                    </m:r>
-                    <m:r>
-                      <a:rPr lang="de-DE" sz="2800" i="1">
-                        <a:latin typeface="Cambria Math" panose="02040503050406030204" pitchFamily="18" charset="0"/>
-                      </a:rPr>
-                      <m:t>=</m:t>
-                    </m:r>
                     <m:sSub>
                       <m:sSubPr>
                         <m:ctrlPr>
-                          <a:rPr lang="de-DE" sz="2800" i="1">
+                          <a:rPr lang="de-DE" sz="2800" i="1" smtClean="0">
                             <a:latin typeface="Cambria Math" panose="02040503050406030204" pitchFamily="18" charset="0"/>
                           </a:rPr>
                         </m:ctrlPr>
@@ -5366,46 +5354,15 @@
                           <a:rPr lang="de-DE" sz="2800" b="0" i="1" smtClean="0">
                             <a:latin typeface="Cambria Math" panose="02040503050406030204" pitchFamily="18" charset="0"/>
                           </a:rPr>
-                          <m:t>𝑅</m:t>
+                          <m:t>𝑉</m:t>
                         </m:r>
                       </m:e>
                       <m:sub>
                         <m:r>
-                          <a:rPr lang="de-DE" sz="2800" i="1">
-                            <a:latin typeface="Cambria Math" panose="02040503050406030204" pitchFamily="18" charset="0"/>
-                          </a:rPr>
-                          <m:t>1</m:t>
-                        </m:r>
-                      </m:sub>
-                    </m:sSub>
-                    <m:r>
-                      <a:rPr lang="de-DE" sz="2800" i="1">
-                        <a:latin typeface="Cambria Math" panose="02040503050406030204" pitchFamily="18" charset="0"/>
-                      </a:rPr>
-                      <m:t>+</m:t>
-                    </m:r>
-                    <m:sSub>
-                      <m:sSubPr>
-                        <m:ctrlPr>
-                          <a:rPr lang="de-DE" sz="2800" i="1">
-                            <a:latin typeface="Cambria Math" panose="02040503050406030204" pitchFamily="18" charset="0"/>
-                          </a:rPr>
-                        </m:ctrlPr>
-                      </m:sSubPr>
-                      <m:e>
-                        <m:r>
                           <a:rPr lang="de-DE" sz="2800" b="0" i="1" smtClean="0">
                             <a:latin typeface="Cambria Math" panose="02040503050406030204" pitchFamily="18" charset="0"/>
                           </a:rPr>
-                          <m:t>𝑅</m:t>
-                        </m:r>
-                      </m:e>
-                      <m:sub>
-                        <m:r>
-                          <a:rPr lang="de-DE" sz="2800" i="1">
-                            <a:latin typeface="Cambria Math" panose="02040503050406030204" pitchFamily="18" charset="0"/>
-                          </a:rPr>
-                          <m:t>2</m:t>
+                          <m:t>𝑘</m:t>
                         </m:r>
                       </m:sub>
                     </m:sSub>
@@ -5413,76 +5370,13 @@
                       <a:rPr lang="de-DE" sz="2800" b="0" i="1" smtClean="0">
                         <a:latin typeface="Cambria Math" panose="02040503050406030204" pitchFamily="18" charset="0"/>
                       </a:rPr>
-                      <m:t>;     </m:t>
+                      <m:t>=</m:t>
                     </m:r>
-                    <m:f>
-                      <m:fPr>
-                        <m:ctrlPr>
-                          <a:rPr lang="de-DE" sz="2800" i="1" smtClean="0">
-                            <a:latin typeface="Cambria Math" panose="02040503050406030204" pitchFamily="18" charset="0"/>
-                          </a:rPr>
-                        </m:ctrlPr>
-                      </m:fPr>
-                      <m:num>
-                        <m:sSub>
-                          <m:sSubPr>
-                            <m:ctrlPr>
-                              <a:rPr lang="de-DE" sz="2800" i="1" smtClean="0">
-                                <a:latin typeface="Cambria Math" panose="02040503050406030204" pitchFamily="18" charset="0"/>
-                              </a:rPr>
-                            </m:ctrlPr>
-                          </m:sSubPr>
-                          <m:e>
-                            <m:r>
-                              <a:rPr lang="de-DE" sz="2800" b="0" i="1" smtClean="0">
-                                <a:latin typeface="Cambria Math" panose="02040503050406030204" pitchFamily="18" charset="0"/>
-                              </a:rPr>
-                              <m:t>𝑉</m:t>
-                            </m:r>
-                          </m:e>
-                          <m:sub>
-                            <m:r>
-                              <a:rPr lang="de-DE" sz="2800" b="0" i="1" smtClean="0">
-                                <a:latin typeface="Cambria Math" panose="02040503050406030204" pitchFamily="18" charset="0"/>
-                              </a:rPr>
-                              <m:t>1</m:t>
-                            </m:r>
-                          </m:sub>
-                        </m:sSub>
-                      </m:num>
-                      <m:den>
-                        <m:sSub>
-                          <m:sSubPr>
-                            <m:ctrlPr>
-                              <a:rPr lang="de-DE" sz="2800" i="1" smtClean="0">
-                                <a:latin typeface="Cambria Math" panose="02040503050406030204" pitchFamily="18" charset="0"/>
-                              </a:rPr>
-                            </m:ctrlPr>
-                          </m:sSubPr>
-                          <m:e>
-                            <m:r>
-                              <a:rPr lang="de-DE" sz="2800" b="0" i="1" smtClean="0">
-                                <a:latin typeface="Cambria Math" panose="02040503050406030204" pitchFamily="18" charset="0"/>
-                              </a:rPr>
-                              <m:t>𝑉</m:t>
-                            </m:r>
-                          </m:e>
-                          <m:sub>
-                            <m:r>
-                              <a:rPr lang="de-DE" sz="2800" b="0" i="1" smtClean="0">
-                                <a:latin typeface="Cambria Math" panose="02040503050406030204" pitchFamily="18" charset="0"/>
-                              </a:rPr>
-                              <m:t>2</m:t>
-                            </m:r>
-                          </m:sub>
-                        </m:sSub>
-                      </m:den>
-                    </m:f>
                     <m:r>
                       <a:rPr lang="de-DE" sz="2800" b="0" i="1" smtClean="0">
                         <a:latin typeface="Cambria Math" panose="02040503050406030204" pitchFamily="18" charset="0"/>
                       </a:rPr>
-                      <m:t>=</m:t>
+                      <m:t>𝑉</m:t>
                     </m:r>
                     <m:f>
                       <m:fPr>
@@ -5514,6 +5408,77 @@
                               <a:rPr lang="de-DE" sz="2800" b="0" i="1" smtClean="0">
                                 <a:latin typeface="Cambria Math" panose="02040503050406030204" pitchFamily="18" charset="0"/>
                               </a:rPr>
+                              <m:t>𝑘</m:t>
+                            </m:r>
+                          </m:sub>
+                        </m:sSub>
+                      </m:num>
+                      <m:den>
+                        <m:r>
+                          <a:rPr lang="de-DE" sz="2800" b="0" i="1" smtClean="0">
+                            <a:latin typeface="Cambria Math" panose="02040503050406030204" pitchFamily="18" charset="0"/>
+                          </a:rPr>
+                          <m:t>𝑅</m:t>
+                        </m:r>
+                      </m:den>
+                    </m:f>
+                  </m:oMath>
+                </a14:m>
+                <a:endParaRPr lang="de-DE" sz="2800" dirty="0"/>
+              </a:p>
+              <a:p>
+                <a:r>
+                  <a:rPr lang="de-DE" sz="2800" dirty="0"/>
+                  <a:t>for </a:t>
+                </a:r>
+                <a:r>
+                  <a:rPr lang="de-DE" sz="2800" dirty="0" err="1"/>
+                  <a:t>two</a:t>
+                </a:r>
+                <a:r>
+                  <a:rPr lang="de-DE" sz="2800" dirty="0"/>
+                  <a:t> </a:t>
+                </a:r>
+                <a:r>
+                  <a:rPr lang="de-DE" sz="2800" dirty="0" err="1"/>
+                  <a:t>resistors</a:t>
+                </a:r>
+                <a:r>
+                  <a:rPr lang="de-DE" sz="2800" dirty="0"/>
+                  <a:t>:		</a:t>
+                </a:r>
+                <a14:m>
+                  <m:oMath xmlns:m="http://schemas.openxmlformats.org/officeDocument/2006/math">
+                    <m:f>
+                      <m:fPr>
+                        <m:ctrlPr>
+                          <a:rPr lang="de-DE" sz="2800" i="1">
+                            <a:latin typeface="Cambria Math" panose="02040503050406030204" pitchFamily="18" charset="0"/>
+                          </a:rPr>
+                        </m:ctrlPr>
+                      </m:fPr>
+                      <m:num>
+                        <m:sSub>
+                          <m:sSubPr>
+                            <m:ctrlPr>
+                              <a:rPr lang="de-DE" sz="2800" i="1">
+                                <a:latin typeface="Cambria Math" panose="02040503050406030204" pitchFamily="18" charset="0"/>
+                              </a:rPr>
+                            </m:ctrlPr>
+                          </m:sSubPr>
+                          <m:e>
+                            <m:r>
+                              <a:rPr lang="de-DE" sz="2800" b="0" i="1" smtClean="0">
+                                <a:latin typeface="Cambria Math" panose="02040503050406030204" pitchFamily="18" charset="0"/>
+                              </a:rPr>
+                              <m:t>𝑉</m:t>
+                            </m:r>
+                          </m:e>
+                          <m:sub>
+                            <m:r>
+                              <a:rPr lang="de-DE" sz="2800" i="1">
+                                <a:latin typeface="Cambria Math" panose="02040503050406030204" pitchFamily="18" charset="0"/>
+                              </a:rPr>
                               <m:t>1</m:t>
                             </m:r>
                           </m:sub>
@@ -5523,7 +5488,7 @@
                         <m:sSub>
                           <m:sSubPr>
                             <m:ctrlPr>
-                              <a:rPr lang="de-DE" sz="2800" b="0" i="1" smtClean="0">
+                              <a:rPr lang="de-DE" sz="2800" i="1">
                                 <a:latin typeface="Cambria Math" panose="02040503050406030204" pitchFamily="18" charset="0"/>
                               </a:rPr>
                             </m:ctrlPr>
@@ -5531,6 +5496,75 @@
                           <m:e>
                             <m:r>
                               <a:rPr lang="de-DE" sz="2800" b="0" i="1" smtClean="0">
+                                <a:latin typeface="Cambria Math" panose="02040503050406030204" pitchFamily="18" charset="0"/>
+                              </a:rPr>
+                              <m:t>𝑉</m:t>
+                            </m:r>
+                          </m:e>
+                          <m:sub>
+                            <m:r>
+                              <a:rPr lang="de-DE" sz="2800" i="1">
+                                <a:latin typeface="Cambria Math" panose="02040503050406030204" pitchFamily="18" charset="0"/>
+                              </a:rPr>
+                              <m:t>2</m:t>
+                            </m:r>
+                          </m:sub>
+                        </m:sSub>
+                      </m:den>
+                    </m:f>
+                    <m:r>
+                      <a:rPr lang="de-DE" sz="2800" i="1">
+                        <a:latin typeface="Cambria Math" panose="02040503050406030204" pitchFamily="18" charset="0"/>
+                      </a:rPr>
+                      <m:t>=</m:t>
+                    </m:r>
+                    <m:f>
+                      <m:fPr>
+                        <m:ctrlPr>
+                          <a:rPr lang="de-DE" sz="2800" i="1">
+                            <a:latin typeface="Cambria Math" panose="02040503050406030204" pitchFamily="18" charset="0"/>
+                          </a:rPr>
+                        </m:ctrlPr>
+                      </m:fPr>
+                      <m:num>
+                        <m:sSub>
+                          <m:sSubPr>
+                            <m:ctrlPr>
+                              <a:rPr lang="de-DE" sz="2800" i="1">
+                                <a:latin typeface="Cambria Math" panose="02040503050406030204" pitchFamily="18" charset="0"/>
+                              </a:rPr>
+                            </m:ctrlPr>
+                          </m:sSubPr>
+                          <m:e>
+                            <m:r>
+                              <a:rPr lang="de-DE" sz="2800" i="1">
+                                <a:latin typeface="Cambria Math" panose="02040503050406030204" pitchFamily="18" charset="0"/>
+                              </a:rPr>
+                              <m:t>𝑅</m:t>
+                            </m:r>
+                          </m:e>
+                          <m:sub>
+                            <m:r>
+                              <a:rPr lang="de-DE" sz="2800" b="0" i="1" smtClean="0">
+                                <a:latin typeface="Cambria Math" panose="02040503050406030204" pitchFamily="18" charset="0"/>
+                              </a:rPr>
+                              <m:t>1</m:t>
+                            </m:r>
+                          </m:sub>
+                        </m:sSub>
+                      </m:num>
+                      <m:den>
+                        <m:sSub>
+                          <m:sSubPr>
+                            <m:ctrlPr>
+                              <a:rPr lang="de-DE" sz="2800" i="1">
+                                <a:latin typeface="Cambria Math" panose="02040503050406030204" pitchFamily="18" charset="0"/>
+                              </a:rPr>
+                            </m:ctrlPr>
+                          </m:sSubPr>
+                          <m:e>
+                            <m:r>
+                              <a:rPr lang="de-DE" sz="2800" i="1">
                                 <a:latin typeface="Cambria Math" panose="02040503050406030204" pitchFamily="18" charset="0"/>
                               </a:rPr>
                               <m:t>𝑅</m:t>
@@ -5571,8 +5605,8 @@
             </p:nvSpPr>
             <p:spPr>
               <a:xfrm>
-                <a:off x="838201" y="5829937"/>
-                <a:ext cx="10515599" cy="662938"/>
+                <a:off x="838201" y="5465002"/>
+                <a:ext cx="10515599" cy="1310359"/>
               </a:xfrm>
               <a:prstGeom prst="rect">
                 <a:avLst/>
@@ -5580,7 +5614,7 @@
               <a:blipFill>
                 <a:blip r:embed="rId8"/>
                 <a:stretch>
-                  <a:fillRect l="-2171" t="-1852" b="-11111"/>
+                  <a:fillRect l="-2171" t="-1923" b="-2885"/>
                 </a:stretch>
               </a:blipFill>
             </p:spPr>
@@ -6607,8 +6641,8 @@
             </p:nvSpPr>
             <p:spPr>
               <a:xfrm>
-                <a:off x="838200" y="5829937"/>
-                <a:ext cx="10197662" cy="662938"/>
+                <a:off x="520262" y="5829937"/>
+                <a:ext cx="11138338" cy="615681"/>
               </a:xfrm>
               <a:prstGeom prst="rect">
                 <a:avLst/>
@@ -6622,35 +6656,35 @@
               <a:lstStyle/>
               <a:p>
                 <a:r>
-                  <a:rPr lang="de-DE" sz="2800" dirty="0"/>
+                  <a:rPr lang="de-DE" sz="2600" dirty="0"/>
                   <a:t>for </a:t>
                 </a:r>
                 <a:r>
-                  <a:rPr lang="de-DE" sz="2800" dirty="0" err="1"/>
+                  <a:rPr lang="de-DE" sz="2600" dirty="0" err="1"/>
                   <a:t>two</a:t>
                 </a:r>
                 <a:r>
-                  <a:rPr lang="de-DE" sz="2800" dirty="0"/>
+                  <a:rPr lang="de-DE" sz="2600" dirty="0"/>
                   <a:t> </a:t>
                 </a:r>
                 <a:r>
-                  <a:rPr lang="de-DE" sz="2800" dirty="0" err="1"/>
+                  <a:rPr lang="de-DE" sz="2600" dirty="0" err="1"/>
                   <a:t>resistors</a:t>
                 </a:r>
                 <a:r>
-                  <a:rPr lang="de-DE" sz="2800" dirty="0"/>
+                  <a:rPr lang="de-DE" sz="2600" dirty="0"/>
                   <a:t>:	</a:t>
                 </a:r>
                 <a14:m>
                   <m:oMath xmlns:m="http://schemas.openxmlformats.org/officeDocument/2006/math">
                     <m:r>
-                      <a:rPr lang="de-DE" sz="2800" b="0" i="1" smtClean="0">
+                      <a:rPr lang="de-DE" sz="2600" b="0" i="1" smtClean="0">
                         <a:latin typeface="Cambria Math" panose="02040503050406030204" pitchFamily="18" charset="0"/>
                       </a:rPr>
                       <m:t>𝑅</m:t>
                     </m:r>
                     <m:r>
-                      <a:rPr lang="de-DE" sz="2800" i="1">
+                      <a:rPr lang="de-DE" sz="2600" i="1">
                         <a:latin typeface="Cambria Math" panose="02040503050406030204" pitchFamily="18" charset="0"/>
                       </a:rPr>
                       <m:t>=</m:t>
@@ -6658,7 +6692,7 @@
                     <m:f>
                       <m:fPr>
                         <m:ctrlPr>
-                          <a:rPr lang="de-DE" sz="2800" i="1">
+                          <a:rPr lang="de-DE" sz="2600" i="1">
                             <a:latin typeface="Cambria Math" panose="02040503050406030204" pitchFamily="18" charset="0"/>
                           </a:rPr>
                         </m:ctrlPr>
@@ -6667,14 +6701,14 @@
                         <m:sSub>
                           <m:sSubPr>
                             <m:ctrlPr>
-                              <a:rPr lang="de-DE" sz="2800" i="1">
+                              <a:rPr lang="de-DE" sz="2600" i="1">
                                 <a:latin typeface="Cambria Math" panose="02040503050406030204" pitchFamily="18" charset="0"/>
                               </a:rPr>
                             </m:ctrlPr>
                           </m:sSubPr>
                           <m:e>
                             <m:r>
-                              <a:rPr lang="de-DE" sz="2800" b="0" i="1" smtClean="0">
+                              <a:rPr lang="de-DE" sz="2600" b="0" i="1" smtClean="0">
                                 <a:latin typeface="Cambria Math" panose="02040503050406030204" pitchFamily="18" charset="0"/>
                               </a:rPr>
                               <m:t>𝑅</m:t>
@@ -6682,7 +6716,7 @@
                           </m:e>
                           <m:sub>
                             <m:r>
-                              <a:rPr lang="de-DE" sz="2800" i="1">
+                              <a:rPr lang="de-DE" sz="2600" i="1">
                                 <a:latin typeface="Cambria Math" panose="02040503050406030204" pitchFamily="18" charset="0"/>
                               </a:rPr>
                               <m:t>1</m:t>
@@ -6692,14 +6726,14 @@
                         <m:sSub>
                           <m:sSubPr>
                             <m:ctrlPr>
-                              <a:rPr lang="de-DE" sz="2800" i="1">
+                              <a:rPr lang="de-DE" sz="2600" i="1">
                                 <a:latin typeface="Cambria Math" panose="02040503050406030204" pitchFamily="18" charset="0"/>
                               </a:rPr>
                             </m:ctrlPr>
                           </m:sSubPr>
                           <m:e>
                             <m:r>
-                              <a:rPr lang="de-DE" sz="2800" b="0" i="1" smtClean="0">
+                              <a:rPr lang="de-DE" sz="2600" b="0" i="1" smtClean="0">
                                 <a:latin typeface="Cambria Math" panose="02040503050406030204" pitchFamily="18" charset="0"/>
                               </a:rPr>
                               <m:t>𝑅</m:t>
@@ -6707,7 +6741,7 @@
                           </m:e>
                           <m:sub>
                             <m:r>
-                              <a:rPr lang="de-DE" sz="2800" i="1">
+                              <a:rPr lang="de-DE" sz="2600" i="1">
                                 <a:latin typeface="Cambria Math" panose="02040503050406030204" pitchFamily="18" charset="0"/>
                               </a:rPr>
                               <m:t>2</m:t>
@@ -6719,14 +6753,14 @@
                         <m:sSub>
                           <m:sSubPr>
                             <m:ctrlPr>
-                              <a:rPr lang="de-DE" sz="2800" i="1" smtClean="0">
+                              <a:rPr lang="de-DE" sz="2600" i="1" smtClean="0">
                                 <a:latin typeface="Cambria Math" panose="02040503050406030204" pitchFamily="18" charset="0"/>
                               </a:rPr>
                             </m:ctrlPr>
                           </m:sSubPr>
                           <m:e>
                             <m:r>
-                              <a:rPr lang="de-DE" sz="2800" b="0" i="1" smtClean="0">
+                              <a:rPr lang="de-DE" sz="2600" b="0" i="1" smtClean="0">
                                 <a:latin typeface="Cambria Math" panose="02040503050406030204" pitchFamily="18" charset="0"/>
                               </a:rPr>
                               <m:t>𝑅</m:t>
@@ -6734,7 +6768,7 @@
                           </m:e>
                           <m:sub>
                             <m:r>
-                              <a:rPr lang="de-DE" sz="2800" i="1">
+                              <a:rPr lang="de-DE" sz="2600" i="1">
                                 <a:latin typeface="Cambria Math" panose="02040503050406030204" pitchFamily="18" charset="0"/>
                               </a:rPr>
                               <m:t>1</m:t>
@@ -6742,7 +6776,7 @@
                           </m:sub>
                         </m:sSub>
                         <m:r>
-                          <a:rPr lang="de-DE" sz="2800" i="1">
+                          <a:rPr lang="de-DE" sz="2600" i="1">
                             <a:latin typeface="Cambria Math" panose="02040503050406030204" pitchFamily="18" charset="0"/>
                           </a:rPr>
                           <m:t>+</m:t>
@@ -6750,14 +6784,14 @@
                         <m:sSub>
                           <m:sSubPr>
                             <m:ctrlPr>
-                              <a:rPr lang="de-DE" sz="2800" i="1">
+                              <a:rPr lang="de-DE" sz="2600" i="1">
                                 <a:latin typeface="Cambria Math" panose="02040503050406030204" pitchFamily="18" charset="0"/>
                               </a:rPr>
                             </m:ctrlPr>
                           </m:sSubPr>
                           <m:e>
                             <m:r>
-                              <a:rPr lang="de-DE" sz="2800" b="0" i="1" smtClean="0">
+                              <a:rPr lang="de-DE" sz="2600" b="0" i="1" smtClean="0">
                                 <a:latin typeface="Cambria Math" panose="02040503050406030204" pitchFamily="18" charset="0"/>
                               </a:rPr>
                               <m:t>𝑅</m:t>
@@ -6765,7 +6799,7 @@
                           </m:e>
                           <m:sub>
                             <m:r>
-                              <a:rPr lang="de-DE" sz="2800" i="1">
+                              <a:rPr lang="de-DE" sz="2600" i="1">
                                 <a:latin typeface="Cambria Math" panose="02040503050406030204" pitchFamily="18" charset="0"/>
                               </a:rPr>
                               <m:t>2</m:t>
@@ -6775,7 +6809,7 @@
                       </m:den>
                     </m:f>
                     <m:r>
-                      <a:rPr lang="de-DE" sz="2800" b="0" i="1" smtClean="0">
+                      <a:rPr lang="de-DE" sz="2600" b="0" i="1" smtClean="0">
                         <a:latin typeface="Cambria Math" panose="02040503050406030204" pitchFamily="18" charset="0"/>
                       </a:rPr>
                       <m:t>;     </m:t>
@@ -6783,7 +6817,7 @@
                     <m:f>
                       <m:fPr>
                         <m:ctrlPr>
-                          <a:rPr lang="de-DE" sz="2800" i="1" smtClean="0">
+                          <a:rPr lang="de-DE" sz="2600" i="1" smtClean="0">
                             <a:latin typeface="Cambria Math" panose="02040503050406030204" pitchFamily="18" charset="0"/>
                           </a:rPr>
                         </m:ctrlPr>
@@ -6792,14 +6826,14 @@
                         <m:sSub>
                           <m:sSubPr>
                             <m:ctrlPr>
-                              <a:rPr lang="de-DE" sz="2800" i="1" smtClean="0">
+                              <a:rPr lang="de-DE" sz="2600" i="1" smtClean="0">
                                 <a:latin typeface="Cambria Math" panose="02040503050406030204" pitchFamily="18" charset="0"/>
                               </a:rPr>
                             </m:ctrlPr>
                           </m:sSubPr>
                           <m:e>
                             <m:r>
-                              <a:rPr lang="de-DE" sz="2800" b="0" i="1" smtClean="0">
+                              <a:rPr lang="de-DE" sz="2600" b="0" i="1" smtClean="0">
                                 <a:latin typeface="Cambria Math" panose="02040503050406030204" pitchFamily="18" charset="0"/>
                               </a:rPr>
                               <m:t>𝐼</m:t>
@@ -6807,7 +6841,7 @@
                           </m:e>
                           <m:sub>
                             <m:r>
-                              <a:rPr lang="de-DE" sz="2800" b="0" i="1" smtClean="0">
+                              <a:rPr lang="de-DE" sz="2600" b="0" i="1" smtClean="0">
                                 <a:latin typeface="Cambria Math" panose="02040503050406030204" pitchFamily="18" charset="0"/>
                               </a:rPr>
                               <m:t>1</m:t>
@@ -6819,14 +6853,14 @@
                         <m:sSub>
                           <m:sSubPr>
                             <m:ctrlPr>
-                              <a:rPr lang="de-DE" sz="2800" i="1" smtClean="0">
+                              <a:rPr lang="de-DE" sz="2600" i="1" smtClean="0">
                                 <a:latin typeface="Cambria Math" panose="02040503050406030204" pitchFamily="18" charset="0"/>
                               </a:rPr>
                             </m:ctrlPr>
                           </m:sSubPr>
                           <m:e>
                             <m:r>
-                              <a:rPr lang="de-DE" sz="2800" b="0" i="1" smtClean="0">
+                              <a:rPr lang="de-DE" sz="2600" b="0" i="1" smtClean="0">
                                 <a:latin typeface="Cambria Math" panose="02040503050406030204" pitchFamily="18" charset="0"/>
                               </a:rPr>
                               <m:t>𝐼</m:t>
@@ -6834,7 +6868,7 @@
                           </m:e>
                           <m:sub>
                             <m:r>
-                              <a:rPr lang="de-DE" sz="2800" b="0" i="1" smtClean="0">
+                              <a:rPr lang="de-DE" sz="2600" b="0" i="1" smtClean="0">
                                 <a:latin typeface="Cambria Math" panose="02040503050406030204" pitchFamily="18" charset="0"/>
                               </a:rPr>
                               <m:t>2</m:t>
@@ -6844,7 +6878,7 @@
                       </m:den>
                     </m:f>
                     <m:r>
-                      <a:rPr lang="de-DE" sz="2800" b="0" i="1" smtClean="0">
+                      <a:rPr lang="de-DE" sz="2600" b="0" i="1" smtClean="0">
                         <a:latin typeface="Cambria Math" panose="02040503050406030204" pitchFamily="18" charset="0"/>
                       </a:rPr>
                       <m:t>=</m:t>
@@ -6852,7 +6886,7 @@
                     <m:f>
                       <m:fPr>
                         <m:ctrlPr>
-                          <a:rPr lang="de-DE" sz="2800" b="0" i="1" smtClean="0">
+                          <a:rPr lang="de-DE" sz="2600" b="0" i="1" smtClean="0">
                             <a:latin typeface="Cambria Math" panose="02040503050406030204" pitchFamily="18" charset="0"/>
                           </a:rPr>
                         </m:ctrlPr>
@@ -6861,14 +6895,14 @@
                         <m:sSub>
                           <m:sSubPr>
                             <m:ctrlPr>
-                              <a:rPr lang="de-DE" sz="2800" b="0" i="1" smtClean="0">
+                              <a:rPr lang="de-DE" sz="2600" b="0" i="1" smtClean="0">
                                 <a:latin typeface="Cambria Math" panose="02040503050406030204" pitchFamily="18" charset="0"/>
                               </a:rPr>
                             </m:ctrlPr>
                           </m:sSubPr>
                           <m:e>
                             <m:r>
-                              <a:rPr lang="de-DE" sz="2800" b="0" i="1" smtClean="0">
+                              <a:rPr lang="de-DE" sz="2600" b="0" i="1" smtClean="0">
                                 <a:latin typeface="Cambria Math" panose="02040503050406030204" pitchFamily="18" charset="0"/>
                               </a:rPr>
                               <m:t>𝑅</m:t>
@@ -6876,7 +6910,7 @@
                           </m:e>
                           <m:sub>
                             <m:r>
-                              <a:rPr lang="de-DE" sz="2800" b="0" i="1" smtClean="0">
+                              <a:rPr lang="de-DE" sz="2600" b="0" i="1" smtClean="0">
                                 <a:latin typeface="Cambria Math" panose="02040503050406030204" pitchFamily="18" charset="0"/>
                               </a:rPr>
                               <m:t>2</m:t>
@@ -6888,14 +6922,14 @@
                         <m:sSub>
                           <m:sSubPr>
                             <m:ctrlPr>
-                              <a:rPr lang="de-DE" sz="2800" b="0" i="1" smtClean="0">
+                              <a:rPr lang="de-DE" sz="2600" b="0" i="1" smtClean="0">
                                 <a:latin typeface="Cambria Math" panose="02040503050406030204" pitchFamily="18" charset="0"/>
                               </a:rPr>
                             </m:ctrlPr>
                           </m:sSubPr>
                           <m:e>
                             <m:r>
-                              <a:rPr lang="de-DE" sz="2800" b="0" i="1" smtClean="0">
+                              <a:rPr lang="de-DE" sz="2600" b="0" i="1" smtClean="0">
                                 <a:latin typeface="Cambria Math" panose="02040503050406030204" pitchFamily="18" charset="0"/>
                               </a:rPr>
                               <m:t>𝑅</m:t>
@@ -6903,7 +6937,7 @@
                           </m:e>
                           <m:sub>
                             <m:r>
-                              <a:rPr lang="de-DE" sz="2800" b="0" i="1" smtClean="0">
+                              <a:rPr lang="de-DE" sz="2600" b="0" i="1" smtClean="0">
                                 <a:latin typeface="Cambria Math" panose="02040503050406030204" pitchFamily="18" charset="0"/>
                               </a:rPr>
                               <m:t>1</m:t>
@@ -6914,7 +6948,155 @@
                     </m:f>
                   </m:oMath>
                 </a14:m>
-                <a:endParaRPr lang="de-DE" sz="2800" dirty="0"/>
+                <a:r>
+                  <a:rPr lang="de-DE" sz="2600" dirty="0"/>
+                  <a:t> </a:t>
+                </a:r>
+                <a14:m>
+                  <m:oMath xmlns:m="http://schemas.openxmlformats.org/officeDocument/2006/math">
+                    <m:r>
+                      <a:rPr lang="de-DE" sz="2600" i="1">
+                        <a:latin typeface="Cambria Math" panose="02040503050406030204" pitchFamily="18" charset="0"/>
+                      </a:rPr>
+                      <m:t>;    </m:t>
+                    </m:r>
+                    <m:sSub>
+                      <m:sSubPr>
+                        <m:ctrlPr>
+                          <a:rPr lang="de-DE" sz="2600" i="1">
+                            <a:latin typeface="Cambria Math" panose="02040503050406030204" pitchFamily="18" charset="0"/>
+                          </a:rPr>
+                        </m:ctrlPr>
+                      </m:sSubPr>
+                      <m:e>
+                        <m:r>
+                          <a:rPr lang="de-DE" sz="2600" b="0" i="1" smtClean="0">
+                            <a:latin typeface="Cambria Math" panose="02040503050406030204" pitchFamily="18" charset="0"/>
+                          </a:rPr>
+                          <m:t>𝐼</m:t>
+                        </m:r>
+                      </m:e>
+                      <m:sub>
+                        <m:r>
+                          <a:rPr lang="de-DE" sz="2600" i="1">
+                            <a:latin typeface="Cambria Math" panose="02040503050406030204" pitchFamily="18" charset="0"/>
+                          </a:rPr>
+                          <m:t>1</m:t>
+                        </m:r>
+                      </m:sub>
+                    </m:sSub>
+                    <m:r>
+                      <a:rPr lang="de-DE" sz="2600" i="1">
+                        <a:latin typeface="Cambria Math" panose="02040503050406030204" pitchFamily="18" charset="0"/>
+                      </a:rPr>
+                      <m:t>=</m:t>
+                    </m:r>
+                    <m:r>
+                      <a:rPr lang="de-DE" sz="2600" b="0" i="1" smtClean="0">
+                        <a:latin typeface="Cambria Math" panose="02040503050406030204" pitchFamily="18" charset="0"/>
+                      </a:rPr>
+                      <m:t>𝐼</m:t>
+                    </m:r>
+                    <m:f>
+                      <m:fPr>
+                        <m:ctrlPr>
+                          <a:rPr lang="de-DE" sz="2600" i="1">
+                            <a:latin typeface="Cambria Math" panose="02040503050406030204" pitchFamily="18" charset="0"/>
+                          </a:rPr>
+                        </m:ctrlPr>
+                      </m:fPr>
+                      <m:num>
+                        <m:sSub>
+                          <m:sSubPr>
+                            <m:ctrlPr>
+                              <a:rPr lang="de-DE" sz="2600" i="1">
+                                <a:latin typeface="Cambria Math" panose="02040503050406030204" pitchFamily="18" charset="0"/>
+                              </a:rPr>
+                            </m:ctrlPr>
+                          </m:sSubPr>
+                          <m:e>
+                            <m:r>
+                              <a:rPr lang="de-DE" sz="2600" b="0" i="1" smtClean="0">
+                                <a:latin typeface="Cambria Math" panose="02040503050406030204" pitchFamily="18" charset="0"/>
+                              </a:rPr>
+                              <m:t>𝑅</m:t>
+                            </m:r>
+                          </m:e>
+                          <m:sub>
+                            <m:r>
+                              <a:rPr lang="de-DE" sz="2600" i="1">
+                                <a:latin typeface="Cambria Math" panose="02040503050406030204" pitchFamily="18" charset="0"/>
+                              </a:rPr>
+                              <m:t>2</m:t>
+                            </m:r>
+                          </m:sub>
+                        </m:sSub>
+                      </m:num>
+                      <m:den>
+                        <m:sSub>
+                          <m:sSubPr>
+                            <m:ctrlPr>
+                              <a:rPr lang="de-DE" sz="2600" i="1">
+                                <a:latin typeface="Cambria Math" panose="02040503050406030204" pitchFamily="18" charset="0"/>
+                              </a:rPr>
+                            </m:ctrlPr>
+                          </m:sSubPr>
+                          <m:e>
+                            <m:r>
+                              <a:rPr lang="de-DE" sz="2600" b="0" i="1" smtClean="0">
+                                <a:latin typeface="Cambria Math" panose="02040503050406030204" pitchFamily="18" charset="0"/>
+                              </a:rPr>
+                              <m:t>𝑅</m:t>
+                            </m:r>
+                          </m:e>
+                          <m:sub>
+                            <m:r>
+                              <a:rPr lang="de-DE" sz="2600" i="1">
+                                <a:latin typeface="Cambria Math" panose="02040503050406030204" pitchFamily="18" charset="0"/>
+                              </a:rPr>
+                              <m:t>1</m:t>
+                            </m:r>
+                          </m:sub>
+                        </m:sSub>
+                        <m:r>
+                          <a:rPr lang="de-DE" sz="2600" i="1">
+                            <a:latin typeface="Cambria Math" panose="02040503050406030204" pitchFamily="18" charset="0"/>
+                          </a:rPr>
+                          <m:t>+</m:t>
+                        </m:r>
+                        <m:sSub>
+                          <m:sSubPr>
+                            <m:ctrlPr>
+                              <a:rPr lang="de-DE" sz="2600" i="1">
+                                <a:latin typeface="Cambria Math" panose="02040503050406030204" pitchFamily="18" charset="0"/>
+                              </a:rPr>
+                            </m:ctrlPr>
+                          </m:sSubPr>
+                          <m:e>
+                            <m:r>
+                              <a:rPr lang="de-DE" sz="2600" b="0" i="1" smtClean="0">
+                                <a:latin typeface="Cambria Math" panose="02040503050406030204" pitchFamily="18" charset="0"/>
+                              </a:rPr>
+                              <m:t>𝑅</m:t>
+                            </m:r>
+                          </m:e>
+                          <m:sub>
+                            <m:r>
+                              <a:rPr lang="de-DE" sz="2600" i="1">
+                                <a:latin typeface="Cambria Math" panose="02040503050406030204" pitchFamily="18" charset="0"/>
+                              </a:rPr>
+                              <m:t>2</m:t>
+                            </m:r>
+                          </m:sub>
+                        </m:sSub>
+                      </m:den>
+                    </m:f>
+                  </m:oMath>
+                </a14:m>
+                <a:r>
+                  <a:rPr lang="de-DE" sz="2600" dirty="0"/>
+                  <a:t>   (current divider rule)</a:t>
+                </a:r>
               </a:p>
             </p:txBody>
           </p:sp>
@@ -6936,8 +7118,8 @@
             </p:nvSpPr>
             <p:spPr>
               <a:xfrm>
-                <a:off x="838200" y="5829937"/>
-                <a:ext cx="10197662" cy="662938"/>
+                <a:off x="520262" y="5829937"/>
+                <a:ext cx="11138338" cy="615681"/>
               </a:xfrm>
               <a:prstGeom prst="rect">
                 <a:avLst/>
@@ -6945,7 +7127,7 @@
               <a:blipFill>
                 <a:blip r:embed="rId7"/>
                 <a:stretch>
-                  <a:fillRect l="-2242" t="-1852" b="-11111"/>
+                  <a:fillRect l="-1706" t="-2000" b="-10000"/>
                 </a:stretch>
               </a:blipFill>
             </p:spPr>
